--- a/builder/assets/reference-pages/hr-age-gender-pyramid.pptx
+++ b/builder/assets/reference-pages/hr-age-gender-pyramid.pptx
@@ -1097,7 +1097,7 @@
                   <a:srgbClr val="15375F"/>
                 </a:solidFill>
               </a:rPr>
-              <a:t>36–45 岁段占比 41%，形成腰部堵塞与底部断层，未来三年 68 个岗位面临经验断代</a:t>
+              <a:t>36–45 Proportion of age groups 41%, forming waist blockage and bottom fault, in the next three years 68 Positions facing experience shortage</a:t>
             </a:r>
           </a:p>
         </p:txBody>
@@ -1182,7 +1182,7 @@
                   <a:srgbClr val="15375F"/>
                 </a:solidFill>
               </a:rPr>
-              <a:t>男性｜398 人</a:t>
+              <a:t>male｜398 people</a:t>
             </a:r>
           </a:p>
         </p:txBody>
@@ -1232,7 +1232,7 @@
                   <a:srgbClr val="697386"/>
                 </a:solidFill>
               </a:rPr>
-              <a:t>年龄段</a:t>
+              <a:t>age group</a:t>
             </a:r>
           </a:p>
         </p:txBody>
@@ -1282,7 +1282,7 @@
                   <a:srgbClr val="E8872D"/>
                 </a:solidFill>
               </a:rPr>
-              <a:t>女性｜402 人</a:t>
+              <a:t>women｜402 people</a:t>
             </a:r>
           </a:p>
         </p:txBody>
@@ -1332,7 +1332,7 @@
                   <a:srgbClr val="697386"/>
                 </a:solidFill>
               </a:rPr>
-              <a:t>司龄</a:t>
+              <a:t>Si Ling</a:t>
             </a:r>
           </a:p>
         </p:txBody>
@@ -1382,7 +1382,7 @@
                   <a:srgbClr val="697386"/>
                 </a:solidFill>
               </a:rPr>
-              <a:t>薪酬</a:t>
+              <a:t>Salary</a:t>
             </a:r>
           </a:p>
         </p:txBody>
@@ -1432,7 +1432,7 @@
                   <a:srgbClr val="697386"/>
                 </a:solidFill>
               </a:rPr>
-              <a:t>离职</a:t>
+              <a:t>Resign</a:t>
             </a:r>
           </a:p>
         </p:txBody>
@@ -1482,7 +1482,7 @@
                   <a:srgbClr val="697386"/>
                 </a:solidFill>
               </a:rPr>
-              <a:t>管理</a:t>
+              <a:t>management</a:t>
             </a:r>
           </a:p>
         </p:txBody>
@@ -1762,7 +1762,7 @@
                   <a:srgbClr val="15375F"/>
                 </a:solidFill>
               </a:rPr>
-              <a:t>51 岁以上</a:t>
+              <a:t>51 years and above</a:t>
             </a:r>
           </a:p>
         </p:txBody>
@@ -1812,7 +1812,7 @@
                   <a:srgbClr val="172033"/>
                 </a:solidFill>
               </a:rPr>
-              <a:t>12.8年</a:t>
+              <a:t>12.8year</a:t>
             </a:r>
           </a:p>
         </p:txBody>
@@ -1862,7 +1862,7 @@
                   <a:srgbClr val="172033"/>
                 </a:solidFill>
               </a:rPr>
-              <a:t>29.4万</a:t>
+              <a:t>29.4million</a:t>
             </a:r>
           </a:p>
         </p:txBody>
@@ -2292,7 +2292,7 @@
                   <a:srgbClr val="172033"/>
                 </a:solidFill>
               </a:rPr>
-              <a:t>11.2年</a:t>
+              <a:t>11.2year</a:t>
             </a:r>
           </a:p>
         </p:txBody>
@@ -2342,7 +2342,7 @@
                   <a:srgbClr val="172033"/>
                 </a:solidFill>
               </a:rPr>
-              <a:t>27.8万</a:t>
+              <a:t>27.8million</a:t>
             </a:r>
           </a:p>
         </p:txBody>
@@ -2772,7 +2772,7 @@
                   <a:srgbClr val="172033"/>
                 </a:solidFill>
               </a:rPr>
-              <a:t>9.4年</a:t>
+              <a:t>9.4year</a:t>
             </a:r>
           </a:p>
         </p:txBody>
@@ -2822,7 +2822,7 @@
                   <a:srgbClr val="172033"/>
                 </a:solidFill>
               </a:rPr>
-              <a:t>25.6万</a:t>
+              <a:t>25.6million</a:t>
             </a:r>
           </a:p>
         </p:txBody>
@@ -3252,7 +3252,7 @@
                   <a:srgbClr val="172033"/>
                 </a:solidFill>
               </a:rPr>
-              <a:t>7.1年</a:t>
+              <a:t>7.1year</a:t>
             </a:r>
           </a:p>
         </p:txBody>
@@ -3302,7 +3302,7 @@
                   <a:srgbClr val="172033"/>
                 </a:solidFill>
               </a:rPr>
-              <a:t>22.8万</a:t>
+              <a:t>22.8million</a:t>
             </a:r>
           </a:p>
         </p:txBody>
@@ -3732,7 +3732,7 @@
                   <a:srgbClr val="172033"/>
                 </a:solidFill>
               </a:rPr>
-              <a:t>4.8年</a:t>
+              <a:t>4.8year</a:t>
             </a:r>
           </a:p>
         </p:txBody>
@@ -3782,7 +3782,7 @@
                   <a:srgbClr val="172033"/>
                 </a:solidFill>
               </a:rPr>
-              <a:t>18.6万</a:t>
+              <a:t>18.6million</a:t>
             </a:r>
           </a:p>
         </p:txBody>
@@ -4212,7 +4212,7 @@
                   <a:srgbClr val="172033"/>
                 </a:solidFill>
               </a:rPr>
-              <a:t>2.6年</a:t>
+              <a:t>2.6year</a:t>
             </a:r>
           </a:p>
         </p:txBody>
@@ -4262,7 +4262,7 @@
                   <a:srgbClr val="172033"/>
                 </a:solidFill>
               </a:rPr>
-              <a:t>13.8万</a:t>
+              <a:t>13.8million</a:t>
             </a:r>
           </a:p>
         </p:txBody>
@@ -4768,7 +4768,7 @@
                   <a:srgbClr val="172033"/>
                 </a:solidFill>
               </a:rPr>
-              <a:t>0.9年</a:t>
+              <a:t>0.9year</a:t>
             </a:r>
           </a:p>
         </p:txBody>
@@ -4818,7 +4818,7 @@
                   <a:srgbClr val="172033"/>
                 </a:solidFill>
               </a:rPr>
-              <a:t>9.6万</a:t>
+              <a:t>9.6million</a:t>
             </a:r>
           </a:p>
         </p:txBody>
@@ -4925,7 +4925,7 @@
       </p:sp>
       <p:sp>
         <p:nvSpPr>
-          <p:cNvPr id="82" name="管理洞察-rail">
+          <p:cNvPr id="82" name="management insights-rail">
             <a:extLst xmlns:a="http://schemas.openxmlformats.org/drawingml/2006/main">
               <a:ext uri="{FF2B5EF4-FFF2-40B4-BE49-F238E27FC236}">
                 <a16:creationId xmlns:a16="http://schemas.microsoft.com/office/drawing/2014/main" id="{7D5DD5FD-1774-427A-B215-303E5C5894C3}"/>
@@ -4960,7 +4960,7 @@
       </p:sp>
       <p:sp>
         <p:nvSpPr>
-          <p:cNvPr id="83" name="管理洞察-title">
+          <p:cNvPr id="83" name="management insights-title">
             <a:extLst xmlns:a="http://schemas.openxmlformats.org/drawingml/2006/main">
               <a:ext uri="{FF2B5EF4-FFF2-40B4-BE49-F238E27FC236}">
                 <a16:creationId xmlns:a16="http://schemas.microsoft.com/office/drawing/2014/main" id="{12189742-5623-487B-9222-0930610900FF}"/>
@@ -5003,14 +5003,14 @@
                   <a:srgbClr val="15375F"/>
                 </a:solidFill>
               </a:rPr>
-              <a:t>管理洞察</a:t>
-            </a:r>
-          </a:p>
-        </p:txBody>
-      </p:sp>
-      <p:sp>
-        <p:nvSpPr>
-          <p:cNvPr id="84" name="管理洞察-1">
+              <a:t>management insights</a:t>
+            </a:r>
+          </a:p>
+        </p:txBody>
+      </p:sp>
+      <p:sp>
+        <p:nvSpPr>
+          <p:cNvPr id="84" name="management insights-1">
             <a:extLst xmlns:a="http://schemas.openxmlformats.org/drawingml/2006/main">
               <a:ext uri="{FF2B5EF4-FFF2-40B4-BE49-F238E27FC236}">
                 <a16:creationId xmlns:a16="http://schemas.microsoft.com/office/drawing/2014/main" id="{D673D0C5-8323-4F61-969C-6505405F0518}"/>
@@ -5059,14 +5059,14 @@
                   <a:srgbClr val="172033"/>
                 </a:solidFill>
               </a:rPr>
-              <a:t>1  腰部员工占比过高，晋升通道拥堵</a:t>
-            </a:r>
-          </a:p>
-        </p:txBody>
-      </p:sp>
-      <p:sp>
-        <p:nvSpPr>
-          <p:cNvPr id="85" name="管理洞察-2">
+              <a:t>1  The proportion of waist-level employees is too high and promotion channels are congested</a:t>
+            </a:r>
+          </a:p>
+        </p:txBody>
+      </p:sp>
+      <p:sp>
+        <p:nvSpPr>
+          <p:cNvPr id="85" name="management insights-2">
             <a:extLst xmlns:a="http://schemas.openxmlformats.org/drawingml/2006/main">
               <a:ext uri="{FF2B5EF4-FFF2-40B4-BE49-F238E27FC236}">
                 <a16:creationId xmlns:a16="http://schemas.microsoft.com/office/drawing/2014/main" id="{49F2393B-F01B-4680-9380-588F30F24972}"/>
@@ -5115,14 +5115,14 @@
                   <a:srgbClr val="172033"/>
                 </a:solidFill>
               </a:rPr>
-              <a:t>2  30 岁以下占比偏低，后备力量不足</a:t>
-            </a:r>
-          </a:p>
-        </p:txBody>
-      </p:sp>
-      <p:sp>
-        <p:nvSpPr>
-          <p:cNvPr id="86" name="管理洞察-3">
+              <a:t>2  30 The proportion of under-year-olds is low and the reserve force is insufficient.</a:t>
+            </a:r>
+          </a:p>
+        </p:txBody>
+      </p:sp>
+      <p:sp>
+        <p:nvSpPr>
+          <p:cNvPr id="86" name="management insights-3">
             <a:extLst xmlns:a="http://schemas.openxmlformats.org/drawingml/2006/main">
               <a:ext uri="{FF2B5EF4-FFF2-40B4-BE49-F238E27FC236}">
                 <a16:creationId xmlns:a16="http://schemas.microsoft.com/office/drawing/2014/main" id="{05ADE7D5-7F5B-4D64-8F64-FABC79C4CC5A}"/>
@@ -5171,7 +5171,7 @@
                   <a:srgbClr val="172033"/>
                 </a:solidFill>
               </a:rPr>
-              <a:t>3  高龄关键岗位需提前完成知识转移</a:t>
+              <a:t>3  Key positions for the elderly need to complete knowledge transfer in advance</a:t>
             </a:r>
           </a:p>
         </p:txBody>
@@ -5227,7 +5227,7 @@
                   <a:srgbClr val="15375F"/>
                 </a:solidFill>
               </a:rPr>
-              <a:t>补充校招 60 人、内部提拔 36 人、完成 68 个关键岗位知识转移</a:t>
+              <a:t>Supplementary school recruitment 60 People, internal promotion 36 person, complete 68 knowledge transfer to key positions</a:t>
             </a:r>
           </a:p>
         </p:txBody>
